--- a/黒崎/AI研修一覧/A-104_AIにできること・できないこと/スライド.pptx
+++ b/黒崎/AI研修一覧/A-104_AIにできること・できないこと/スライド.pptx
@@ -2243,7 +2243,7 @@
         <p:spPr>
           <a:xfrm>
             <a:off x="457200" y="1554480"/>
-            <a:ext cx="8229600" cy="914400"/>
+            <a:ext cx="8229600" cy="640080"/>
           </a:xfrm>
           <a:prstGeom prst="rect">
             <a:avLst/>
@@ -2258,9 +2258,6 @@
           <a:lstStyle/>
           <a:p>
             <a:pPr algn="ctr" indent="0" marL="0">
-              <a:lnSpc>
-                <a:spcPct val="120000"/>
-              </a:lnSpc>
               <a:buNone/>
             </a:pPr>
             <a:r>
@@ -2272,27 +2269,7 @@
                 <a:ea typeface="Calibri" pitchFamily="34" charset="-122"/>
                 <a:cs typeface="Calibri" pitchFamily="34" charset="-120"/>
               </a:rPr>
-              <a:t>AIにできること</a:t>
-            </a:r>
-            <a:endParaRPr lang="en-US" sz="4000" dirty="0"/>
-          </a:p>
-          <a:p>
-            <a:pPr algn="ctr" indent="0" marL="0">
-              <a:lnSpc>
-                <a:spcPct val="120000"/>
-              </a:lnSpc>
-              <a:buNone/>
-            </a:pPr>
-            <a:r>
-              <a:rPr lang="en-US" sz="4000" b="1" dirty="0">
-                <a:solidFill>
-                  <a:srgbClr val="FFFFFF"/>
-                </a:solidFill>
-                <a:latin typeface="Calibri" pitchFamily="34" charset="0"/>
-                <a:ea typeface="Calibri" pitchFamily="34" charset="-122"/>
-                <a:cs typeface="Calibri" pitchFamily="34" charset="-120"/>
-              </a:rPr>
-              <a:t>・できないこと</a:t>
+              <a:t>AIにできること・できないこと</a:t>
             </a:r>
             <a:endParaRPr lang="en-US" sz="4000" dirty="0"/>
           </a:p>
